--- a/宣道詩/(宣道詩162)誰願從主.pptx
+++ b/宣道詩/(宣道詩162)誰願從主.pptx
@@ -173,7 +173,7 @@
           <a:lstStyle/>
           <a:p>
             <a:r>
-              <a:rPr lang="en-US" altLang="zh-TW" smtClean="0"/>
+              <a:rPr lang="en-US" altLang="zh-TW"/>
               <a:t>Click to edit Master title style</a:t>
             </a:r>
             <a:endParaRPr lang="zh-TW" altLang="en-US"/>
@@ -292,7 +292,7 @@
           </a:lstStyle>
           <a:p>
             <a:r>
-              <a:rPr lang="en-US" altLang="zh-TW" smtClean="0"/>
+              <a:rPr lang="en-US" altLang="zh-TW"/>
               <a:t>Click to edit Master subtitle style</a:t>
             </a:r>
             <a:endParaRPr lang="zh-TW" altLang="en-US"/>
@@ -316,7 +316,7 @@
           <a:p>
             <a:fld id="{EC514149-91C5-4D48-991E-D9859C4A7691}" type="datetimeFigureOut">
               <a:rPr lang="zh-TW" altLang="en-US" smtClean="0"/>
-              <a:t>2022/6/24</a:t>
+              <a:t>2025/10/17</a:t>
             </a:fld>
             <a:endParaRPr lang="zh-TW" altLang="en-US"/>
           </a:p>
@@ -374,13 +374,6 @@
   <p:clrMapOvr>
     <a:masterClrMapping/>
   </p:clrMapOvr>
-  <p:timing>
-    <p:tnLst>
-      <p:par>
-        <p:cTn id="1" dur="indefinite" restart="never" nodeType="tmRoot"/>
-      </p:par>
-    </p:tnLst>
-  </p:timing>
 </p:sldLayout>
 </file>
 
@@ -417,7 +410,7 @@
           <a:lstStyle/>
           <a:p>
             <a:r>
-              <a:rPr lang="en-US" altLang="zh-TW" smtClean="0"/>
+              <a:rPr lang="en-US" altLang="zh-TW"/>
               <a:t>Click to edit Master title style</a:t>
             </a:r>
             <a:endParaRPr lang="zh-TW" altLang="en-US"/>
@@ -441,35 +434,35 @@
           <a:p>
             <a:pPr lvl="0"/>
             <a:r>
-              <a:rPr lang="en-US" altLang="zh-TW" smtClean="0"/>
+              <a:rPr lang="en-US" altLang="zh-TW"/>
               <a:t>Edit Master text styles</a:t>
             </a:r>
           </a:p>
           <a:p>
             <a:pPr lvl="1"/>
             <a:r>
-              <a:rPr lang="en-US" altLang="zh-TW" smtClean="0"/>
+              <a:rPr lang="en-US" altLang="zh-TW"/>
               <a:t>Second level</a:t>
             </a:r>
           </a:p>
           <a:p>
             <a:pPr lvl="2"/>
             <a:r>
-              <a:rPr lang="en-US" altLang="zh-TW" smtClean="0"/>
+              <a:rPr lang="en-US" altLang="zh-TW"/>
               <a:t>Third level</a:t>
             </a:r>
           </a:p>
           <a:p>
             <a:pPr lvl="3"/>
             <a:r>
-              <a:rPr lang="en-US" altLang="zh-TW" smtClean="0"/>
+              <a:rPr lang="en-US" altLang="zh-TW"/>
               <a:t>Fourth level</a:t>
             </a:r>
           </a:p>
           <a:p>
             <a:pPr lvl="4"/>
             <a:r>
-              <a:rPr lang="en-US" altLang="zh-TW" smtClean="0"/>
+              <a:rPr lang="en-US" altLang="zh-TW"/>
               <a:t>Fifth level</a:t>
             </a:r>
             <a:endParaRPr lang="zh-TW" altLang="en-US"/>
@@ -493,7 +486,7 @@
           <a:p>
             <a:fld id="{EC514149-91C5-4D48-991E-D9859C4A7691}" type="datetimeFigureOut">
               <a:rPr lang="zh-TW" altLang="en-US" smtClean="0"/>
-              <a:t>2022/6/24</a:t>
+              <a:t>2025/10/17</a:t>
             </a:fld>
             <a:endParaRPr lang="zh-TW" altLang="en-US"/>
           </a:p>
@@ -551,13 +544,6 @@
   <p:clrMapOvr>
     <a:masterClrMapping/>
   </p:clrMapOvr>
-  <p:timing>
-    <p:tnLst>
-      <p:par>
-        <p:cTn id="1" dur="indefinite" restart="never" nodeType="tmRoot"/>
-      </p:par>
-    </p:tnLst>
-  </p:timing>
 </p:sldLayout>
 </file>
 
@@ -599,7 +585,7 @@
           <a:lstStyle/>
           <a:p>
             <a:r>
-              <a:rPr lang="en-US" altLang="zh-TW" smtClean="0"/>
+              <a:rPr lang="en-US" altLang="zh-TW"/>
               <a:t>Click to edit Master title style</a:t>
             </a:r>
             <a:endParaRPr lang="zh-TW" altLang="en-US"/>
@@ -628,35 +614,35 @@
           <a:p>
             <a:pPr lvl="0"/>
             <a:r>
-              <a:rPr lang="en-US" altLang="zh-TW" smtClean="0"/>
+              <a:rPr lang="en-US" altLang="zh-TW"/>
               <a:t>Edit Master text styles</a:t>
             </a:r>
           </a:p>
           <a:p>
             <a:pPr lvl="1"/>
             <a:r>
-              <a:rPr lang="en-US" altLang="zh-TW" smtClean="0"/>
+              <a:rPr lang="en-US" altLang="zh-TW"/>
               <a:t>Second level</a:t>
             </a:r>
           </a:p>
           <a:p>
             <a:pPr lvl="2"/>
             <a:r>
-              <a:rPr lang="en-US" altLang="zh-TW" smtClean="0"/>
+              <a:rPr lang="en-US" altLang="zh-TW"/>
               <a:t>Third level</a:t>
             </a:r>
           </a:p>
           <a:p>
             <a:pPr lvl="3"/>
             <a:r>
-              <a:rPr lang="en-US" altLang="zh-TW" smtClean="0"/>
+              <a:rPr lang="en-US" altLang="zh-TW"/>
               <a:t>Fourth level</a:t>
             </a:r>
           </a:p>
           <a:p>
             <a:pPr lvl="4"/>
             <a:r>
-              <a:rPr lang="en-US" altLang="zh-TW" smtClean="0"/>
+              <a:rPr lang="en-US" altLang="zh-TW"/>
               <a:t>Fifth level</a:t>
             </a:r>
             <a:endParaRPr lang="zh-TW" altLang="en-US"/>
@@ -680,7 +666,7 @@
           <a:p>
             <a:fld id="{EC514149-91C5-4D48-991E-D9859C4A7691}" type="datetimeFigureOut">
               <a:rPr lang="zh-TW" altLang="en-US" smtClean="0"/>
-              <a:t>2022/6/24</a:t>
+              <a:t>2025/10/17</a:t>
             </a:fld>
             <a:endParaRPr lang="zh-TW" altLang="en-US"/>
           </a:p>
@@ -738,13 +724,6 @@
   <p:clrMapOvr>
     <a:masterClrMapping/>
   </p:clrMapOvr>
-  <p:timing>
-    <p:tnLst>
-      <p:par>
-        <p:cTn id="1" dur="indefinite" restart="never" nodeType="tmRoot"/>
-      </p:par>
-    </p:tnLst>
-  </p:timing>
 </p:sldLayout>
 </file>
 
@@ -781,7 +760,7 @@
           <a:lstStyle/>
           <a:p>
             <a:r>
-              <a:rPr lang="en-US" altLang="zh-TW" smtClean="0"/>
+              <a:rPr lang="en-US" altLang="zh-TW"/>
               <a:t>Click to edit Master title style</a:t>
             </a:r>
             <a:endParaRPr lang="zh-TW" altLang="en-US"/>
@@ -805,35 +784,35 @@
           <a:p>
             <a:pPr lvl="0"/>
             <a:r>
-              <a:rPr lang="en-US" altLang="zh-TW" smtClean="0"/>
+              <a:rPr lang="en-US" altLang="zh-TW"/>
               <a:t>Edit Master text styles</a:t>
             </a:r>
           </a:p>
           <a:p>
             <a:pPr lvl="1"/>
             <a:r>
-              <a:rPr lang="en-US" altLang="zh-TW" smtClean="0"/>
+              <a:rPr lang="en-US" altLang="zh-TW"/>
               <a:t>Second level</a:t>
             </a:r>
           </a:p>
           <a:p>
             <a:pPr lvl="2"/>
             <a:r>
-              <a:rPr lang="en-US" altLang="zh-TW" smtClean="0"/>
+              <a:rPr lang="en-US" altLang="zh-TW"/>
               <a:t>Third level</a:t>
             </a:r>
           </a:p>
           <a:p>
             <a:pPr lvl="3"/>
             <a:r>
-              <a:rPr lang="en-US" altLang="zh-TW" smtClean="0"/>
+              <a:rPr lang="en-US" altLang="zh-TW"/>
               <a:t>Fourth level</a:t>
             </a:r>
           </a:p>
           <a:p>
             <a:pPr lvl="4"/>
             <a:r>
-              <a:rPr lang="en-US" altLang="zh-TW" smtClean="0"/>
+              <a:rPr lang="en-US" altLang="zh-TW"/>
               <a:t>Fifth level</a:t>
             </a:r>
             <a:endParaRPr lang="zh-TW" altLang="en-US"/>
@@ -857,7 +836,7 @@
           <a:p>
             <a:fld id="{EC514149-91C5-4D48-991E-D9859C4A7691}" type="datetimeFigureOut">
               <a:rPr lang="zh-TW" altLang="en-US" smtClean="0"/>
-              <a:t>2022/6/24</a:t>
+              <a:t>2025/10/17</a:t>
             </a:fld>
             <a:endParaRPr lang="zh-TW" altLang="en-US"/>
           </a:p>
@@ -915,13 +894,6 @@
   <p:clrMapOvr>
     <a:masterClrMapping/>
   </p:clrMapOvr>
-  <p:timing>
-    <p:tnLst>
-      <p:par>
-        <p:cTn id="1" dur="indefinite" restart="never" nodeType="tmRoot"/>
-      </p:par>
-    </p:tnLst>
-  </p:timing>
 </p:sldLayout>
 </file>
 
@@ -967,7 +939,7 @@
           </a:lstStyle>
           <a:p>
             <a:r>
-              <a:rPr lang="en-US" altLang="zh-TW" smtClean="0"/>
+              <a:rPr lang="en-US" altLang="zh-TW"/>
               <a:t>Click to edit Master title style</a:t>
             </a:r>
             <a:endParaRPr lang="zh-TW" altLang="en-US"/>
@@ -1087,7 +1059,7 @@
           <a:p>
             <a:pPr lvl="0"/>
             <a:r>
-              <a:rPr lang="en-US" altLang="zh-TW" smtClean="0"/>
+              <a:rPr lang="en-US" altLang="zh-TW"/>
               <a:t>Edit Master text styles</a:t>
             </a:r>
           </a:p>
@@ -1110,7 +1082,7 @@
           <a:p>
             <a:fld id="{EC514149-91C5-4D48-991E-D9859C4A7691}" type="datetimeFigureOut">
               <a:rPr lang="zh-TW" altLang="en-US" smtClean="0"/>
-              <a:t>2022/6/24</a:t>
+              <a:t>2025/10/17</a:t>
             </a:fld>
             <a:endParaRPr lang="zh-TW" altLang="en-US"/>
           </a:p>
@@ -1168,13 +1140,6 @@
   <p:clrMapOvr>
     <a:masterClrMapping/>
   </p:clrMapOvr>
-  <p:timing>
-    <p:tnLst>
-      <p:par>
-        <p:cTn id="1" dur="indefinite" restart="never" nodeType="tmRoot"/>
-      </p:par>
-    </p:tnLst>
-  </p:timing>
 </p:sldLayout>
 </file>
 
@@ -1211,7 +1176,7 @@
           <a:lstStyle/>
           <a:p>
             <a:r>
-              <a:rPr lang="en-US" altLang="zh-TW" smtClean="0"/>
+              <a:rPr lang="en-US" altLang="zh-TW"/>
               <a:t>Click to edit Master title style</a:t>
             </a:r>
             <a:endParaRPr lang="zh-TW" altLang="en-US"/>
@@ -1268,35 +1233,35 @@
           <a:p>
             <a:pPr lvl="0"/>
             <a:r>
-              <a:rPr lang="en-US" altLang="zh-TW" smtClean="0"/>
+              <a:rPr lang="en-US" altLang="zh-TW"/>
               <a:t>Edit Master text styles</a:t>
             </a:r>
           </a:p>
           <a:p>
             <a:pPr lvl="1"/>
             <a:r>
-              <a:rPr lang="en-US" altLang="zh-TW" smtClean="0"/>
+              <a:rPr lang="en-US" altLang="zh-TW"/>
               <a:t>Second level</a:t>
             </a:r>
           </a:p>
           <a:p>
             <a:pPr lvl="2"/>
             <a:r>
-              <a:rPr lang="en-US" altLang="zh-TW" smtClean="0"/>
+              <a:rPr lang="en-US" altLang="zh-TW"/>
               <a:t>Third level</a:t>
             </a:r>
           </a:p>
           <a:p>
             <a:pPr lvl="3"/>
             <a:r>
-              <a:rPr lang="en-US" altLang="zh-TW" smtClean="0"/>
+              <a:rPr lang="en-US" altLang="zh-TW"/>
               <a:t>Fourth level</a:t>
             </a:r>
           </a:p>
           <a:p>
             <a:pPr lvl="4"/>
             <a:r>
-              <a:rPr lang="en-US" altLang="zh-TW" smtClean="0"/>
+              <a:rPr lang="en-US" altLang="zh-TW"/>
               <a:t>Fifth level</a:t>
             </a:r>
             <a:endParaRPr lang="zh-TW" altLang="en-US"/>
@@ -1353,35 +1318,35 @@
           <a:p>
             <a:pPr lvl="0"/>
             <a:r>
-              <a:rPr lang="en-US" altLang="zh-TW" smtClean="0"/>
+              <a:rPr lang="en-US" altLang="zh-TW"/>
               <a:t>Edit Master text styles</a:t>
             </a:r>
           </a:p>
           <a:p>
             <a:pPr lvl="1"/>
             <a:r>
-              <a:rPr lang="en-US" altLang="zh-TW" smtClean="0"/>
+              <a:rPr lang="en-US" altLang="zh-TW"/>
               <a:t>Second level</a:t>
             </a:r>
           </a:p>
           <a:p>
             <a:pPr lvl="2"/>
             <a:r>
-              <a:rPr lang="en-US" altLang="zh-TW" smtClean="0"/>
+              <a:rPr lang="en-US" altLang="zh-TW"/>
               <a:t>Third level</a:t>
             </a:r>
           </a:p>
           <a:p>
             <a:pPr lvl="3"/>
             <a:r>
-              <a:rPr lang="en-US" altLang="zh-TW" smtClean="0"/>
+              <a:rPr lang="en-US" altLang="zh-TW"/>
               <a:t>Fourth level</a:t>
             </a:r>
           </a:p>
           <a:p>
             <a:pPr lvl="4"/>
             <a:r>
-              <a:rPr lang="en-US" altLang="zh-TW" smtClean="0"/>
+              <a:rPr lang="en-US" altLang="zh-TW"/>
               <a:t>Fifth level</a:t>
             </a:r>
             <a:endParaRPr lang="zh-TW" altLang="en-US"/>
@@ -1405,7 +1370,7 @@
           <a:p>
             <a:fld id="{EC514149-91C5-4D48-991E-D9859C4A7691}" type="datetimeFigureOut">
               <a:rPr lang="zh-TW" altLang="en-US" smtClean="0"/>
-              <a:t>2022/6/24</a:t>
+              <a:t>2025/10/17</a:t>
             </a:fld>
             <a:endParaRPr lang="zh-TW" altLang="en-US"/>
           </a:p>
@@ -1463,13 +1428,6 @@
   <p:clrMapOvr>
     <a:masterClrMapping/>
   </p:clrMapOvr>
-  <p:timing>
-    <p:tnLst>
-      <p:par>
-        <p:cTn id="1" dur="indefinite" restart="never" nodeType="tmRoot"/>
-      </p:par>
-    </p:tnLst>
-  </p:timing>
 </p:sldLayout>
 </file>
 
@@ -1510,7 +1468,7 @@
           </a:lstStyle>
           <a:p>
             <a:r>
-              <a:rPr lang="en-US" altLang="zh-TW" smtClean="0"/>
+              <a:rPr lang="en-US" altLang="zh-TW"/>
               <a:t>Click to edit Master title style</a:t>
             </a:r>
             <a:endParaRPr lang="zh-TW" altLang="en-US"/>
@@ -1576,7 +1534,7 @@
           <a:p>
             <a:pPr lvl="0"/>
             <a:r>
-              <a:rPr lang="en-US" altLang="zh-TW" smtClean="0"/>
+              <a:rPr lang="en-US" altLang="zh-TW"/>
               <a:t>Edit Master text styles</a:t>
             </a:r>
           </a:p>
@@ -1632,35 +1590,35 @@
           <a:p>
             <a:pPr lvl="0"/>
             <a:r>
-              <a:rPr lang="en-US" altLang="zh-TW" smtClean="0"/>
+              <a:rPr lang="en-US" altLang="zh-TW"/>
               <a:t>Edit Master text styles</a:t>
             </a:r>
           </a:p>
           <a:p>
             <a:pPr lvl="1"/>
             <a:r>
-              <a:rPr lang="en-US" altLang="zh-TW" smtClean="0"/>
+              <a:rPr lang="en-US" altLang="zh-TW"/>
               <a:t>Second level</a:t>
             </a:r>
           </a:p>
           <a:p>
             <a:pPr lvl="2"/>
             <a:r>
-              <a:rPr lang="en-US" altLang="zh-TW" smtClean="0"/>
+              <a:rPr lang="en-US" altLang="zh-TW"/>
               <a:t>Third level</a:t>
             </a:r>
           </a:p>
           <a:p>
             <a:pPr lvl="3"/>
             <a:r>
-              <a:rPr lang="en-US" altLang="zh-TW" smtClean="0"/>
+              <a:rPr lang="en-US" altLang="zh-TW"/>
               <a:t>Fourth level</a:t>
             </a:r>
           </a:p>
           <a:p>
             <a:pPr lvl="4"/>
             <a:r>
-              <a:rPr lang="en-US" altLang="zh-TW" smtClean="0"/>
+              <a:rPr lang="en-US" altLang="zh-TW"/>
               <a:t>Fifth level</a:t>
             </a:r>
             <a:endParaRPr lang="zh-TW" altLang="en-US"/>
@@ -1726,7 +1684,7 @@
           <a:p>
             <a:pPr lvl="0"/>
             <a:r>
-              <a:rPr lang="en-US" altLang="zh-TW" smtClean="0"/>
+              <a:rPr lang="en-US" altLang="zh-TW"/>
               <a:t>Edit Master text styles</a:t>
             </a:r>
           </a:p>
@@ -1782,35 +1740,35 @@
           <a:p>
             <a:pPr lvl="0"/>
             <a:r>
-              <a:rPr lang="en-US" altLang="zh-TW" smtClean="0"/>
+              <a:rPr lang="en-US" altLang="zh-TW"/>
               <a:t>Edit Master text styles</a:t>
             </a:r>
           </a:p>
           <a:p>
             <a:pPr lvl="1"/>
             <a:r>
-              <a:rPr lang="en-US" altLang="zh-TW" smtClean="0"/>
+              <a:rPr lang="en-US" altLang="zh-TW"/>
               <a:t>Second level</a:t>
             </a:r>
           </a:p>
           <a:p>
             <a:pPr lvl="2"/>
             <a:r>
-              <a:rPr lang="en-US" altLang="zh-TW" smtClean="0"/>
+              <a:rPr lang="en-US" altLang="zh-TW"/>
               <a:t>Third level</a:t>
             </a:r>
           </a:p>
           <a:p>
             <a:pPr lvl="3"/>
             <a:r>
-              <a:rPr lang="en-US" altLang="zh-TW" smtClean="0"/>
+              <a:rPr lang="en-US" altLang="zh-TW"/>
               <a:t>Fourth level</a:t>
             </a:r>
           </a:p>
           <a:p>
             <a:pPr lvl="4"/>
             <a:r>
-              <a:rPr lang="en-US" altLang="zh-TW" smtClean="0"/>
+              <a:rPr lang="en-US" altLang="zh-TW"/>
               <a:t>Fifth level</a:t>
             </a:r>
             <a:endParaRPr lang="zh-TW" altLang="en-US"/>
@@ -1834,7 +1792,7 @@
           <a:p>
             <a:fld id="{EC514149-91C5-4D48-991E-D9859C4A7691}" type="datetimeFigureOut">
               <a:rPr lang="zh-TW" altLang="en-US" smtClean="0"/>
-              <a:t>2022/6/24</a:t>
+              <a:t>2025/10/17</a:t>
             </a:fld>
             <a:endParaRPr lang="zh-TW" altLang="en-US"/>
           </a:p>
@@ -1892,13 +1850,6 @@
   <p:clrMapOvr>
     <a:masterClrMapping/>
   </p:clrMapOvr>
-  <p:timing>
-    <p:tnLst>
-      <p:par>
-        <p:cTn id="1" dur="indefinite" restart="never" nodeType="tmRoot"/>
-      </p:par>
-    </p:tnLst>
-  </p:timing>
 </p:sldLayout>
 </file>
 
@@ -1935,7 +1886,7 @@
           <a:lstStyle/>
           <a:p>
             <a:r>
-              <a:rPr lang="en-US" altLang="zh-TW" smtClean="0"/>
+              <a:rPr lang="en-US" altLang="zh-TW"/>
               <a:t>Click to edit Master title style</a:t>
             </a:r>
             <a:endParaRPr lang="zh-TW" altLang="en-US"/>
@@ -1959,7 +1910,7 @@
           <a:p>
             <a:fld id="{EC514149-91C5-4D48-991E-D9859C4A7691}" type="datetimeFigureOut">
               <a:rPr lang="zh-TW" altLang="en-US" smtClean="0"/>
-              <a:t>2022/6/24</a:t>
+              <a:t>2025/10/17</a:t>
             </a:fld>
             <a:endParaRPr lang="zh-TW" altLang="en-US"/>
           </a:p>
@@ -2017,13 +1968,6 @@
   <p:clrMapOvr>
     <a:masterClrMapping/>
   </p:clrMapOvr>
-  <p:timing>
-    <p:tnLst>
-      <p:par>
-        <p:cTn id="1" dur="indefinite" restart="never" nodeType="tmRoot"/>
-      </p:par>
-    </p:tnLst>
-  </p:timing>
 </p:sldLayout>
 </file>
 
@@ -2061,7 +2005,7 @@
           <a:p>
             <a:fld id="{EC514149-91C5-4D48-991E-D9859C4A7691}" type="datetimeFigureOut">
               <a:rPr lang="zh-TW" altLang="en-US" smtClean="0"/>
-              <a:t>2022/6/24</a:t>
+              <a:t>2025/10/17</a:t>
             </a:fld>
             <a:endParaRPr lang="zh-TW" altLang="en-US"/>
           </a:p>
@@ -2119,13 +2063,6 @@
   <p:clrMapOvr>
     <a:masterClrMapping/>
   </p:clrMapOvr>
-  <p:timing>
-    <p:tnLst>
-      <p:par>
-        <p:cTn id="1" dur="indefinite" restart="never" nodeType="tmRoot"/>
-      </p:par>
-    </p:tnLst>
-  </p:timing>
 </p:sldLayout>
 </file>
 
@@ -2171,7 +2108,7 @@
           </a:lstStyle>
           <a:p>
             <a:r>
-              <a:rPr lang="en-US" altLang="zh-TW" smtClean="0"/>
+              <a:rPr lang="en-US" altLang="zh-TW"/>
               <a:t>Click to edit Master title style</a:t>
             </a:r>
             <a:endParaRPr lang="zh-TW" altLang="en-US"/>
@@ -2228,35 +2165,35 @@
           <a:p>
             <a:pPr lvl="0"/>
             <a:r>
-              <a:rPr lang="en-US" altLang="zh-TW" smtClean="0"/>
+              <a:rPr lang="en-US" altLang="zh-TW"/>
               <a:t>Edit Master text styles</a:t>
             </a:r>
           </a:p>
           <a:p>
             <a:pPr lvl="1"/>
             <a:r>
-              <a:rPr lang="en-US" altLang="zh-TW" smtClean="0"/>
+              <a:rPr lang="en-US" altLang="zh-TW"/>
               <a:t>Second level</a:t>
             </a:r>
           </a:p>
           <a:p>
             <a:pPr lvl="2"/>
             <a:r>
-              <a:rPr lang="en-US" altLang="zh-TW" smtClean="0"/>
+              <a:rPr lang="en-US" altLang="zh-TW"/>
               <a:t>Third level</a:t>
             </a:r>
           </a:p>
           <a:p>
             <a:pPr lvl="3"/>
             <a:r>
-              <a:rPr lang="en-US" altLang="zh-TW" smtClean="0"/>
+              <a:rPr lang="en-US" altLang="zh-TW"/>
               <a:t>Fourth level</a:t>
             </a:r>
           </a:p>
           <a:p>
             <a:pPr lvl="4"/>
             <a:r>
-              <a:rPr lang="en-US" altLang="zh-TW" smtClean="0"/>
+              <a:rPr lang="en-US" altLang="zh-TW"/>
               <a:t>Fifth level</a:t>
             </a:r>
             <a:endParaRPr lang="zh-TW" altLang="en-US"/>
@@ -2322,7 +2259,7 @@
           <a:p>
             <a:pPr lvl="0"/>
             <a:r>
-              <a:rPr lang="en-US" altLang="zh-TW" smtClean="0"/>
+              <a:rPr lang="en-US" altLang="zh-TW"/>
               <a:t>Edit Master text styles</a:t>
             </a:r>
           </a:p>
@@ -2345,7 +2282,7 @@
           <a:p>
             <a:fld id="{EC514149-91C5-4D48-991E-D9859C4A7691}" type="datetimeFigureOut">
               <a:rPr lang="zh-TW" altLang="en-US" smtClean="0"/>
-              <a:t>2022/6/24</a:t>
+              <a:t>2025/10/17</a:t>
             </a:fld>
             <a:endParaRPr lang="zh-TW" altLang="en-US"/>
           </a:p>
@@ -2403,13 +2340,6 @@
   <p:clrMapOvr>
     <a:masterClrMapping/>
   </p:clrMapOvr>
-  <p:timing>
-    <p:tnLst>
-      <p:par>
-        <p:cTn id="1" dur="indefinite" restart="never" nodeType="tmRoot"/>
-      </p:par>
-    </p:tnLst>
-  </p:timing>
 </p:sldLayout>
 </file>
 
@@ -2455,7 +2385,7 @@
           </a:lstStyle>
           <a:p>
             <a:r>
-              <a:rPr lang="en-US" altLang="zh-TW" smtClean="0"/>
+              <a:rPr lang="en-US" altLang="zh-TW"/>
               <a:t>Click to edit Master title style</a:t>
             </a:r>
             <a:endParaRPr lang="zh-TW" altLang="en-US"/>
@@ -2520,7 +2450,7 @@
           </a:lstStyle>
           <a:p>
             <a:r>
-              <a:rPr lang="en-US" altLang="zh-TW" smtClean="0"/>
+              <a:rPr lang="en-US" altLang="zh-TW"/>
               <a:t>Click icon to add picture</a:t>
             </a:r>
             <a:endParaRPr lang="zh-TW" altLang="en-US"/>
@@ -2586,7 +2516,7 @@
           <a:p>
             <a:pPr lvl="0"/>
             <a:r>
-              <a:rPr lang="en-US" altLang="zh-TW" smtClean="0"/>
+              <a:rPr lang="en-US" altLang="zh-TW"/>
               <a:t>Edit Master text styles</a:t>
             </a:r>
           </a:p>
@@ -2609,7 +2539,7 @@
           <a:p>
             <a:fld id="{EC514149-91C5-4D48-991E-D9859C4A7691}" type="datetimeFigureOut">
               <a:rPr lang="zh-TW" altLang="en-US" smtClean="0"/>
-              <a:t>2022/6/24</a:t>
+              <a:t>2025/10/17</a:t>
             </a:fld>
             <a:endParaRPr lang="zh-TW" altLang="en-US"/>
           </a:p>
@@ -2667,13 +2597,6 @@
   <p:clrMapOvr>
     <a:masterClrMapping/>
   </p:clrMapOvr>
-  <p:timing>
-    <p:tnLst>
-      <p:par>
-        <p:cTn id="1" dur="indefinite" restart="never" nodeType="tmRoot"/>
-      </p:par>
-    </p:tnLst>
-  </p:timing>
 </p:sldLayout>
 </file>
 
@@ -2730,10 +2653,9 @@
           <a:lstStyle/>
           <a:p>
             <a:r>
-              <a:rPr lang="zh-TW" altLang="en-US" smtClean="0"/>
+              <a:rPr lang="zh-TW" altLang="en-US"/>
               <a:t>按一下以編輯母片標題樣式</a:t>
             </a:r>
-            <a:endParaRPr lang="zh-TW" altLang="en-US"/>
           </a:p>
         </p:txBody>
       </p:sp>
@@ -2764,38 +2686,37 @@
           <a:p>
             <a:pPr lvl="0"/>
             <a:r>
-              <a:rPr lang="zh-TW" altLang="en-US" smtClean="0"/>
+              <a:rPr lang="zh-TW" altLang="en-US"/>
               <a:t>按一下以編輯母片文字樣式</a:t>
             </a:r>
           </a:p>
           <a:p>
             <a:pPr lvl="1"/>
             <a:r>
-              <a:rPr lang="zh-TW" altLang="en-US" smtClean="0"/>
+              <a:rPr lang="zh-TW" altLang="en-US"/>
               <a:t>第二層</a:t>
             </a:r>
           </a:p>
           <a:p>
             <a:pPr lvl="2"/>
             <a:r>
-              <a:rPr lang="zh-TW" altLang="en-US" smtClean="0"/>
+              <a:rPr lang="zh-TW" altLang="en-US"/>
               <a:t>第三層</a:t>
             </a:r>
           </a:p>
           <a:p>
             <a:pPr lvl="3"/>
             <a:r>
-              <a:rPr lang="zh-TW" altLang="en-US" smtClean="0"/>
+              <a:rPr lang="zh-TW" altLang="en-US"/>
               <a:t>第四層</a:t>
             </a:r>
           </a:p>
           <a:p>
             <a:pPr lvl="4"/>
             <a:r>
-              <a:rPr lang="zh-TW" altLang="en-US" smtClean="0"/>
+              <a:rPr lang="zh-TW" altLang="en-US"/>
               <a:t>第五層</a:t>
             </a:r>
-            <a:endParaRPr lang="zh-TW" altLang="en-US"/>
           </a:p>
         </p:txBody>
       </p:sp>
@@ -2834,7 +2755,7 @@
           <a:p>
             <a:fld id="{EC514149-91C5-4D48-991E-D9859C4A7691}" type="datetimeFigureOut">
               <a:rPr lang="zh-TW" altLang="en-US" smtClean="0"/>
-              <a:t>2022/6/24</a:t>
+              <a:t>2025/10/17</a:t>
             </a:fld>
             <a:endParaRPr lang="zh-TW" altLang="en-US"/>
           </a:p>
@@ -2942,13 +2863,6 @@
   <p:transition>
     <p:fade/>
   </p:transition>
-  <p:timing>
-    <p:tnLst>
-      <p:par>
-        <p:cTn id="1" dur="indefinite" restart="never" nodeType="tmRoot"/>
-      </p:par>
-    </p:tnLst>
-  </p:timing>
   <p:txStyles>
     <p:titleStyle>
       <a:lvl1pPr algn="ctr" defTabSz="1219170" rtl="0" eaLnBrk="1" latinLnBrk="0" hangingPunct="1">
@@ -3275,7 +3189,7 @@
               </a:rPr>
               <a:t>162</a:t>
             </a:r>
-            <a:r>
+            <a:br>
               <a:rPr lang="en-US" altLang="zh-CN" sz="7200" b="1" i="1" dirty="0">
                 <a:solidFill>
                   <a:srgbClr val="660033"/>
@@ -3290,10 +3204,9 @@
                 <a:latin typeface="微軟正黑體" pitchFamily="34" charset="-120"/>
                 <a:ea typeface="微軟正黑體" pitchFamily="34" charset="-120"/>
               </a:rPr>
-              <a:t/>
-            </a:r>
-            <a:br>
-              <a:rPr lang="en-US" altLang="zh-CN" sz="7200" b="1" i="1" dirty="0">
+            </a:br>
+            <a:r>
+              <a:rPr lang="zh-TW" altLang="en-US" sz="8000" b="1" dirty="0">
                 <a:solidFill>
                   <a:srgbClr val="660033"/>
                 </a:solidFill>
@@ -3307,40 +3220,7 @@
                 <a:latin typeface="微軟正黑體" pitchFamily="34" charset="-120"/>
                 <a:ea typeface="微軟正黑體" pitchFamily="34" charset="-120"/>
               </a:rPr>
-            </a:br>
-            <a:r>
-              <a:rPr lang="zh-TW" altLang="en-US" sz="8000" b="1" dirty="0">
-                <a:solidFill>
-                  <a:srgbClr val="660033"/>
-                </a:solidFill>
-                <a:effectLst>
-                  <a:outerShdw blurRad="38100" dist="38100" dir="2700000" algn="tl">
-                    <a:srgbClr val="000000">
-                      <a:alpha val="43137"/>
-                    </a:srgbClr>
-                  </a:outerShdw>
-                </a:effectLst>
-                <a:latin typeface="微軟正黑體" pitchFamily="34" charset="-120"/>
-                <a:ea typeface="微軟正黑體" pitchFamily="34" charset="-120"/>
-              </a:rPr>
-              <a:t>誰</a:t>
-            </a:r>
-            <a:r>
-              <a:rPr lang="zh-TW" altLang="en-US" sz="8000" b="1" dirty="0">
-                <a:solidFill>
-                  <a:srgbClr val="660033"/>
-                </a:solidFill>
-                <a:effectLst>
-                  <a:outerShdw blurRad="38100" dist="38100" dir="2700000" algn="tl">
-                    <a:srgbClr val="000000">
-                      <a:alpha val="43137"/>
-                    </a:srgbClr>
-                  </a:outerShdw>
-                </a:effectLst>
-                <a:latin typeface="微軟正黑體" pitchFamily="34" charset="-120"/>
-                <a:ea typeface="微軟正黑體" pitchFamily="34" charset="-120"/>
-              </a:rPr>
-              <a:t>願從主</a:t>
+              <a:t>誰願從主</a:t>
             </a:r>
           </a:p>
         </p:txBody>
@@ -3355,13 +3235,6 @@
   <p:clrMapOvr>
     <a:masterClrMapping/>
   </p:clrMapOvr>
-  <p:timing>
-    <p:tnLst>
-      <p:par>
-        <p:cTn id="1" dur="indefinite" restart="never" nodeType="tmRoot"/>
-      </p:par>
-    </p:tnLst>
-  </p:timing>
 </p:sld>
 </file>
 
@@ -3415,47 +3288,27 @@
                 <a:latin typeface="Microsoft JhengHei" pitchFamily="34" charset="-120"/>
                 <a:ea typeface="Microsoft JhengHei" pitchFamily="34" charset="-120"/>
               </a:rPr>
-              <a:t>主受死我得</a:t>
-            </a:r>
-            <a:r>
-              <a:rPr lang="zh-TW" altLang="en-US" sz="6400" b="1" dirty="0">
+              <a:t>主受死我得生</a:t>
+            </a:r>
+            <a:r>
+              <a:rPr lang="en-US" altLang="zh-TW" sz="6400" b="1" dirty="0">
                 <a:solidFill>
                   <a:srgbClr val="660033"/>
                 </a:solidFill>
                 <a:latin typeface="Microsoft JhengHei" pitchFamily="34" charset="-120"/>
                 <a:ea typeface="Microsoft JhengHei" pitchFamily="34" charset="-120"/>
               </a:rPr>
-              <a:t>生</a:t>
-            </a:r>
-            <a:r>
-              <a:rPr lang="en-US" altLang="zh-TW" sz="6400" b="1" dirty="0">
+              <a:t>  </a:t>
+            </a:r>
+            <a:r>
+              <a:rPr lang="zh-TW" altLang="en-US" sz="6400" b="1" dirty="0">
                 <a:solidFill>
                   <a:srgbClr val="660033"/>
                 </a:solidFill>
                 <a:latin typeface="Microsoft JhengHei" pitchFamily="34" charset="-120"/>
                 <a:ea typeface="Microsoft JhengHei" pitchFamily="34" charset="-120"/>
               </a:rPr>
-              <a:t>  </a:t>
-            </a:r>
-            <a:r>
-              <a:rPr lang="zh-TW" altLang="en-US" sz="6400" b="1" dirty="0">
-                <a:solidFill>
-                  <a:srgbClr val="660033"/>
-                </a:solidFill>
-                <a:latin typeface="Microsoft JhengHei" pitchFamily="34" charset="-120"/>
-                <a:ea typeface="Microsoft JhengHei" pitchFamily="34" charset="-120"/>
-              </a:rPr>
-              <a:t>此</a:t>
-            </a:r>
-            <a:r>
-              <a:rPr lang="zh-TW" altLang="en-US" sz="6400" b="1" dirty="0">
-                <a:solidFill>
-                  <a:srgbClr val="660033"/>
-                </a:solidFill>
-                <a:latin typeface="Microsoft JhengHei" pitchFamily="34" charset="-120"/>
-                <a:ea typeface="Microsoft JhengHei" pitchFamily="34" charset="-120"/>
-              </a:rPr>
-              <a:t>恩厚無比</a:t>
+              <a:t>此恩厚無比</a:t>
             </a:r>
             <a:endParaRPr lang="en-US" altLang="zh-TW" sz="6400" b="1" dirty="0">
               <a:solidFill>
@@ -3477,57 +3330,37 @@
                 <a:latin typeface="Microsoft JhengHei" pitchFamily="34" charset="-120"/>
                 <a:ea typeface="Microsoft JhengHei" pitchFamily="34" charset="-120"/>
               </a:rPr>
-              <a:t>我</a:t>
-            </a:r>
-            <a:r>
-              <a:rPr lang="zh-TW" altLang="en-US" sz="6400" b="1" dirty="0">
+              <a:t>我順從主耶穌</a:t>
+            </a:r>
+            <a:r>
+              <a:rPr lang="en-US" altLang="zh-TW" sz="6400" b="1" dirty="0">
                 <a:solidFill>
                   <a:srgbClr val="660033"/>
                 </a:solidFill>
                 <a:latin typeface="Microsoft JhengHei" pitchFamily="34" charset="-120"/>
                 <a:ea typeface="Microsoft JhengHei" pitchFamily="34" charset="-120"/>
               </a:rPr>
-              <a:t>順從主耶穌</a:t>
-            </a:r>
-            <a:r>
-              <a:rPr lang="en-US" altLang="zh-TW" sz="6400" b="1" dirty="0">
+              <a:t>  </a:t>
+            </a:r>
+            <a:r>
+              <a:rPr lang="zh-TW" altLang="en-US" sz="6400" b="1" dirty="0">
                 <a:solidFill>
                   <a:srgbClr val="660033"/>
                 </a:solidFill>
                 <a:latin typeface="Microsoft JhengHei" pitchFamily="34" charset="-120"/>
                 <a:ea typeface="Microsoft JhengHei" pitchFamily="34" charset="-120"/>
               </a:rPr>
-              <a:t>  </a:t>
-            </a:r>
-            <a:r>
-              <a:rPr lang="zh-TW" altLang="en-US" sz="6400" b="1" dirty="0">
+              <a:t>主阿  我屬</a:t>
+            </a:r>
+            <a:r>
+              <a:rPr lang="zh-CN" altLang="en-US" sz="6400" b="1" dirty="0">
                 <a:solidFill>
                   <a:srgbClr val="660033"/>
                 </a:solidFill>
                 <a:latin typeface="Microsoft JhengHei" pitchFamily="34" charset="-120"/>
                 <a:ea typeface="Microsoft JhengHei" pitchFamily="34" charset="-120"/>
               </a:rPr>
-              <a:t>主阿  我</a:t>
-            </a:r>
-            <a:r>
-              <a:rPr lang="zh-TW" altLang="en-US" sz="6400" b="1" dirty="0">
-                <a:solidFill>
-                  <a:srgbClr val="660033"/>
-                </a:solidFill>
-                <a:latin typeface="Microsoft JhengHei" pitchFamily="34" charset="-120"/>
-                <a:ea typeface="Microsoft JhengHei" pitchFamily="34" charset="-120"/>
-              </a:rPr>
-              <a:t>屬</a:t>
-            </a:r>
-            <a:r>
-              <a:rPr lang="zh-CN" altLang="en-US" sz="6400" b="1" dirty="0">
-                <a:solidFill>
-                  <a:srgbClr val="660033"/>
-                </a:solidFill>
-                <a:latin typeface="Microsoft JhengHei" pitchFamily="34" charset="-120"/>
-                <a:ea typeface="Microsoft JhengHei" pitchFamily="34" charset="-120"/>
-              </a:rPr>
-              <a:t>袮</a:t>
+              <a:t>祢</a:t>
             </a:r>
             <a:endParaRPr lang="zh-TW" altLang="en-US" sz="6400" b="1" dirty="0">
               <a:solidFill>
@@ -3588,13 +3421,6 @@
   <p:clrMapOvr>
     <a:masterClrMapping/>
   </p:clrMapOvr>
-  <p:timing>
-    <p:tnLst>
-      <p:par>
-        <p:cTn id="1" dur="indefinite" restart="never" nodeType="tmRoot"/>
-      </p:par>
-    </p:tnLst>
-  </p:timing>
 </p:sld>
 </file>
 
@@ -3731,13 +3557,6 @@
   <p:clrMapOvr>
     <a:masterClrMapping/>
   </p:clrMapOvr>
-  <p:timing>
-    <p:tnLst>
-      <p:par>
-        <p:cTn id="1" dur="indefinite" restart="never" nodeType="tmRoot"/>
-      </p:par>
-    </p:tnLst>
-  </p:timing>
 </p:sld>
 </file>
 
@@ -3813,27 +3632,7 @@
                 <a:latin typeface="Microsoft JhengHei" pitchFamily="34" charset="-120"/>
                 <a:ea typeface="Microsoft JhengHei" pitchFamily="34" charset="-120"/>
               </a:rPr>
-              <a:t>要努力建大</a:t>
-            </a:r>
-            <a:r>
-              <a:rPr lang="zh-TW" altLang="en-US" sz="6400" b="1" dirty="0">
-                <a:solidFill>
-                  <a:srgbClr val="660033"/>
-                </a:solidFill>
-                <a:latin typeface="Microsoft JhengHei" pitchFamily="34" charset="-120"/>
-                <a:ea typeface="Microsoft JhengHei" pitchFamily="34" charset="-120"/>
-              </a:rPr>
-              <a:t>功  一</a:t>
-            </a:r>
-            <a:r>
-              <a:rPr lang="zh-TW" altLang="en-US" sz="6400" b="1" dirty="0">
-                <a:solidFill>
-                  <a:srgbClr val="660033"/>
-                </a:solidFill>
-                <a:latin typeface="Microsoft JhengHei" pitchFamily="34" charset="-120"/>
-                <a:ea typeface="Microsoft JhengHei" pitchFamily="34" charset="-120"/>
-              </a:rPr>
-              <a:t>時不怠慢</a:t>
+              <a:t>要努力建大功  一時不怠慢</a:t>
             </a:r>
           </a:p>
         </p:txBody>
@@ -3887,13 +3686,6 @@
   <p:clrMapOvr>
     <a:masterClrMapping/>
   </p:clrMapOvr>
-  <p:timing>
-    <p:tnLst>
-      <p:par>
-        <p:cTn id="1" dur="indefinite" restart="never" nodeType="tmRoot"/>
-      </p:par>
-    </p:tnLst>
-  </p:timing>
 </p:sld>
 </file>
 
@@ -3947,47 +3739,27 @@
                 <a:latin typeface="Microsoft JhengHei" pitchFamily="34" charset="-120"/>
                 <a:ea typeface="Microsoft JhengHei" pitchFamily="34" charset="-120"/>
               </a:rPr>
-              <a:t>主助我作聖</a:t>
-            </a:r>
-            <a:r>
-              <a:rPr lang="zh-TW" altLang="en-US" sz="6400" b="1" dirty="0">
+              <a:t>主助我作聖工</a:t>
+            </a:r>
+            <a:r>
+              <a:rPr lang="en-US" altLang="zh-TW" sz="6400" b="1" dirty="0">
                 <a:solidFill>
                   <a:srgbClr val="660033"/>
                 </a:solidFill>
                 <a:latin typeface="Microsoft JhengHei" pitchFamily="34" charset="-120"/>
                 <a:ea typeface="Microsoft JhengHei" pitchFamily="34" charset="-120"/>
               </a:rPr>
-              <a:t>工</a:t>
-            </a:r>
-            <a:r>
-              <a:rPr lang="en-US" altLang="zh-TW" sz="6400" b="1" dirty="0">
+              <a:t>  </a:t>
+            </a:r>
+            <a:r>
+              <a:rPr lang="zh-TW" altLang="en-US" sz="6400" b="1" dirty="0">
                 <a:solidFill>
                   <a:srgbClr val="660033"/>
                 </a:solidFill>
                 <a:latin typeface="Microsoft JhengHei" pitchFamily="34" charset="-120"/>
                 <a:ea typeface="Microsoft JhengHei" pitchFamily="34" charset="-120"/>
               </a:rPr>
-              <a:t>  </a:t>
-            </a:r>
-            <a:r>
-              <a:rPr lang="zh-TW" altLang="en-US" sz="6400" b="1" dirty="0">
-                <a:solidFill>
-                  <a:srgbClr val="660033"/>
-                </a:solidFill>
-                <a:latin typeface="Microsoft JhengHei" pitchFamily="34" charset="-120"/>
-                <a:ea typeface="Microsoft JhengHei" pitchFamily="34" charset="-120"/>
-              </a:rPr>
-              <a:t>此</a:t>
-            </a:r>
-            <a:r>
-              <a:rPr lang="zh-TW" altLang="en-US" sz="6400" b="1" dirty="0">
-                <a:solidFill>
-                  <a:srgbClr val="660033"/>
-                </a:solidFill>
-                <a:latin typeface="Microsoft JhengHei" pitchFamily="34" charset="-120"/>
-                <a:ea typeface="Microsoft JhengHei" pitchFamily="34" charset="-120"/>
-              </a:rPr>
-              <a:t>恩厚無比</a:t>
+              <a:t>此恩厚無比</a:t>
             </a:r>
             <a:endParaRPr lang="en-US" altLang="zh-TW" sz="6400" b="1" dirty="0">
               <a:solidFill>
@@ -4009,57 +3781,37 @@
                 <a:latin typeface="Microsoft JhengHei" pitchFamily="34" charset="-120"/>
                 <a:ea typeface="Microsoft JhengHei" pitchFamily="34" charset="-120"/>
               </a:rPr>
-              <a:t>我</a:t>
-            </a:r>
-            <a:r>
-              <a:rPr lang="zh-TW" altLang="en-US" sz="6400" b="1" dirty="0">
+              <a:t>我順從主耶穌</a:t>
+            </a:r>
+            <a:r>
+              <a:rPr lang="en-US" altLang="zh-TW" sz="6400" b="1" dirty="0">
                 <a:solidFill>
                   <a:srgbClr val="660033"/>
                 </a:solidFill>
                 <a:latin typeface="Microsoft JhengHei" pitchFamily="34" charset="-120"/>
                 <a:ea typeface="Microsoft JhengHei" pitchFamily="34" charset="-120"/>
               </a:rPr>
-              <a:t>順從主耶穌</a:t>
-            </a:r>
-            <a:r>
-              <a:rPr lang="en-US" altLang="zh-TW" sz="6400" b="1" dirty="0">
+              <a:t>  </a:t>
+            </a:r>
+            <a:r>
+              <a:rPr lang="zh-TW" altLang="en-US" sz="6400" b="1" dirty="0">
                 <a:solidFill>
                   <a:srgbClr val="660033"/>
                 </a:solidFill>
                 <a:latin typeface="Microsoft JhengHei" pitchFamily="34" charset="-120"/>
                 <a:ea typeface="Microsoft JhengHei" pitchFamily="34" charset="-120"/>
               </a:rPr>
-              <a:t>  </a:t>
-            </a:r>
-            <a:r>
-              <a:rPr lang="zh-TW" altLang="en-US" sz="6400" b="1" dirty="0">
+              <a:t>主阿  我屬</a:t>
+            </a:r>
+            <a:r>
+              <a:rPr lang="zh-CN" altLang="en-US" sz="6400" b="1" dirty="0">
                 <a:solidFill>
                   <a:srgbClr val="660033"/>
                 </a:solidFill>
                 <a:latin typeface="Microsoft JhengHei" pitchFamily="34" charset="-120"/>
                 <a:ea typeface="Microsoft JhengHei" pitchFamily="34" charset="-120"/>
               </a:rPr>
-              <a:t>主阿  我</a:t>
-            </a:r>
-            <a:r>
-              <a:rPr lang="zh-TW" altLang="en-US" sz="6400" b="1" dirty="0">
-                <a:solidFill>
-                  <a:srgbClr val="660033"/>
-                </a:solidFill>
-                <a:latin typeface="Microsoft JhengHei" pitchFamily="34" charset="-120"/>
-                <a:ea typeface="Microsoft JhengHei" pitchFamily="34" charset="-120"/>
-              </a:rPr>
-              <a:t>屬</a:t>
-            </a:r>
-            <a:r>
-              <a:rPr lang="zh-CN" altLang="en-US" sz="6400" b="1" dirty="0">
-                <a:solidFill>
-                  <a:srgbClr val="660033"/>
-                </a:solidFill>
-                <a:latin typeface="Microsoft JhengHei" pitchFamily="34" charset="-120"/>
-                <a:ea typeface="Microsoft JhengHei" pitchFamily="34" charset="-120"/>
-              </a:rPr>
-              <a:t>袮</a:t>
+              <a:t>祢</a:t>
             </a:r>
             <a:endParaRPr lang="zh-TW" altLang="en-US" sz="6400" b="1" dirty="0">
               <a:solidFill>
@@ -4120,13 +3872,6 @@
   <p:clrMapOvr>
     <a:masterClrMapping/>
   </p:clrMapOvr>
-  <p:timing>
-    <p:tnLst>
-      <p:par>
-        <p:cTn id="1" dur="indefinite" restart="never" nodeType="tmRoot"/>
-      </p:par>
-    </p:tnLst>
-  </p:timing>
 </p:sld>
 </file>
 
@@ -4180,17 +3925,7 @@
                 <a:latin typeface="Microsoft JhengHei" pitchFamily="34" charset="-120"/>
                 <a:ea typeface="Microsoft JhengHei" pitchFamily="34" charset="-120"/>
               </a:rPr>
-              <a:t>誰</a:t>
-            </a:r>
-            <a:r>
-              <a:rPr lang="zh-TW" altLang="en-US" sz="6400" b="1" dirty="0">
-                <a:solidFill>
-                  <a:srgbClr val="660033"/>
-                </a:solidFill>
-                <a:latin typeface="Microsoft JhengHei" pitchFamily="34" charset="-120"/>
-                <a:ea typeface="Microsoft JhengHei" pitchFamily="34" charset="-120"/>
-              </a:rPr>
-              <a:t>順從主耶穌  誰奉事我王</a:t>
+              <a:t>誰順從主耶穌  誰奉事我王</a:t>
             </a:r>
             <a:endParaRPr lang="en-US" altLang="zh-TW" sz="6400" b="1" dirty="0">
               <a:solidFill>
@@ -4273,13 +4008,6 @@
   <p:clrMapOvr>
     <a:masterClrMapping/>
   </p:clrMapOvr>
-  <p:timing>
-    <p:tnLst>
-      <p:par>
-        <p:cTn id="1" dur="indefinite" restart="never" nodeType="tmRoot"/>
-      </p:par>
-    </p:tnLst>
-  </p:timing>
 </p:sld>
 </file>
 
@@ -4375,27 +4103,7 @@
                 <a:latin typeface="Microsoft JhengHei" pitchFamily="34" charset="-120"/>
                 <a:ea typeface="Microsoft JhengHei" pitchFamily="34" charset="-120"/>
               </a:rPr>
-              <a:t>誰順從主耶</a:t>
-            </a:r>
-            <a:r>
-              <a:rPr lang="zh-TW" altLang="en-US" sz="6400" b="1" dirty="0">
-                <a:solidFill>
-                  <a:srgbClr val="660033"/>
-                </a:solidFill>
-                <a:latin typeface="Microsoft JhengHei" pitchFamily="34" charset="-120"/>
-                <a:ea typeface="Microsoft JhengHei" pitchFamily="34" charset="-120"/>
-              </a:rPr>
-              <a:t>穌  誰</a:t>
-            </a:r>
-            <a:r>
-              <a:rPr lang="zh-TW" altLang="en-US" sz="6400" b="1" dirty="0">
-                <a:solidFill>
-                  <a:srgbClr val="660033"/>
-                </a:solidFill>
-                <a:latin typeface="Microsoft JhengHei" pitchFamily="34" charset="-120"/>
-                <a:ea typeface="Microsoft JhengHei" pitchFamily="34" charset="-120"/>
-              </a:rPr>
-              <a:t>為主勁旅</a:t>
+              <a:t>誰順從主耶穌  誰為主勁旅</a:t>
             </a:r>
           </a:p>
         </p:txBody>
@@ -4449,13 +4157,6 @@
   <p:clrMapOvr>
     <a:masterClrMapping/>
   </p:clrMapOvr>
-  <p:timing>
-    <p:tnLst>
-      <p:par>
-        <p:cTn id="1" dur="indefinite" restart="never" nodeType="tmRoot"/>
-      </p:par>
-    </p:tnLst>
-  </p:timing>
 </p:sld>
 </file>
 
@@ -4509,47 +4210,27 @@
                 <a:latin typeface="Microsoft JhengHei" pitchFamily="34" charset="-120"/>
                 <a:ea typeface="Microsoft JhengHei" pitchFamily="34" charset="-120"/>
               </a:rPr>
-              <a:t>因蒙救主召</a:t>
-            </a:r>
-            <a:r>
-              <a:rPr lang="zh-TW" altLang="en-US" sz="6400" b="1" dirty="0">
+              <a:t>因蒙救主召我</a:t>
+            </a:r>
+            <a:r>
+              <a:rPr lang="en-US" altLang="zh-TW" sz="6400" b="1" dirty="0">
                 <a:solidFill>
                   <a:srgbClr val="660033"/>
                 </a:solidFill>
                 <a:latin typeface="Microsoft JhengHei" pitchFamily="34" charset="-120"/>
                 <a:ea typeface="Microsoft JhengHei" pitchFamily="34" charset="-120"/>
               </a:rPr>
-              <a:t>我</a:t>
-            </a:r>
-            <a:r>
-              <a:rPr lang="en-US" altLang="zh-TW" sz="6400" b="1" dirty="0">
+              <a:t>  </a:t>
+            </a:r>
+            <a:r>
+              <a:rPr lang="zh-TW" altLang="en-US" sz="6400" b="1" dirty="0">
                 <a:solidFill>
                   <a:srgbClr val="660033"/>
                 </a:solidFill>
                 <a:latin typeface="Microsoft JhengHei" pitchFamily="34" charset="-120"/>
                 <a:ea typeface="Microsoft JhengHei" pitchFamily="34" charset="-120"/>
               </a:rPr>
-              <a:t>  </a:t>
-            </a:r>
-            <a:r>
-              <a:rPr lang="zh-TW" altLang="en-US" sz="6400" b="1" dirty="0">
-                <a:solidFill>
-                  <a:srgbClr val="660033"/>
-                </a:solidFill>
-                <a:latin typeface="Microsoft JhengHei" pitchFamily="34" charset="-120"/>
-                <a:ea typeface="Microsoft JhengHei" pitchFamily="34" charset="-120"/>
-              </a:rPr>
-              <a:t>此</a:t>
-            </a:r>
-            <a:r>
-              <a:rPr lang="zh-TW" altLang="en-US" sz="6400" b="1" dirty="0">
-                <a:solidFill>
-                  <a:srgbClr val="660033"/>
-                </a:solidFill>
-                <a:latin typeface="Microsoft JhengHei" pitchFamily="34" charset="-120"/>
-                <a:ea typeface="Microsoft JhengHei" pitchFamily="34" charset="-120"/>
-              </a:rPr>
-              <a:t>恩厚無比</a:t>
+              <a:t>此恩厚無比</a:t>
             </a:r>
             <a:endParaRPr lang="en-US" altLang="zh-TW" sz="6400" b="1" dirty="0">
               <a:solidFill>
@@ -4571,67 +4252,37 @@
                 <a:latin typeface="Microsoft JhengHei" pitchFamily="34" charset="-120"/>
                 <a:ea typeface="Microsoft JhengHei" pitchFamily="34" charset="-120"/>
               </a:rPr>
-              <a:t>我順從主耶</a:t>
-            </a:r>
-            <a:r>
-              <a:rPr lang="zh-TW" altLang="en-US" sz="6400" b="1" dirty="0">
+              <a:t>我順從主耶穌</a:t>
+            </a:r>
+            <a:r>
+              <a:rPr lang="en-US" altLang="zh-TW" sz="6400" b="1" dirty="0">
                 <a:solidFill>
                   <a:srgbClr val="660033"/>
                 </a:solidFill>
                 <a:latin typeface="Microsoft JhengHei" pitchFamily="34" charset="-120"/>
                 <a:ea typeface="Microsoft JhengHei" pitchFamily="34" charset="-120"/>
               </a:rPr>
-              <a:t>穌</a:t>
-            </a:r>
-            <a:r>
-              <a:rPr lang="en-US" altLang="zh-TW" sz="6400" b="1" dirty="0">
+              <a:t>  </a:t>
+            </a:r>
+            <a:r>
+              <a:rPr lang="zh-TW" altLang="en-US" sz="6400" b="1" dirty="0">
                 <a:solidFill>
                   <a:srgbClr val="660033"/>
                 </a:solidFill>
                 <a:latin typeface="Microsoft JhengHei" pitchFamily="34" charset="-120"/>
                 <a:ea typeface="Microsoft JhengHei" pitchFamily="34" charset="-120"/>
               </a:rPr>
-              <a:t>  </a:t>
-            </a:r>
-            <a:r>
-              <a:rPr lang="zh-TW" altLang="en-US" sz="6400" b="1" dirty="0">
+              <a:t>主阿  我屬</a:t>
+            </a:r>
+            <a:r>
+              <a:rPr lang="zh-CN" altLang="en-US" sz="6400" b="1" dirty="0">
                 <a:solidFill>
                   <a:srgbClr val="660033"/>
                 </a:solidFill>
                 <a:latin typeface="Microsoft JhengHei" pitchFamily="34" charset="-120"/>
                 <a:ea typeface="Microsoft JhengHei" pitchFamily="34" charset="-120"/>
               </a:rPr>
-              <a:t>主</a:t>
-            </a:r>
-            <a:r>
-              <a:rPr lang="zh-TW" altLang="en-US" sz="6400" b="1" dirty="0">
-                <a:solidFill>
-                  <a:srgbClr val="660033"/>
-                </a:solidFill>
-                <a:latin typeface="Microsoft JhengHei" pitchFamily="34" charset="-120"/>
-                <a:ea typeface="Microsoft JhengHei" pitchFamily="34" charset="-120"/>
-              </a:rPr>
-              <a:t>阿  我</a:t>
-            </a:r>
-            <a:r>
-              <a:rPr lang="zh-TW" altLang="en-US" sz="6400" b="1" dirty="0">
-                <a:solidFill>
-                  <a:srgbClr val="660033"/>
-                </a:solidFill>
-                <a:latin typeface="Microsoft JhengHei" pitchFamily="34" charset="-120"/>
-                <a:ea typeface="Microsoft JhengHei" pitchFamily="34" charset="-120"/>
-              </a:rPr>
-              <a:t>屬</a:t>
-            </a:r>
-            <a:r>
-              <a:rPr lang="zh-CN" altLang="en-US" sz="6400" b="1" dirty="0">
-                <a:solidFill>
-                  <a:srgbClr val="660033"/>
-                </a:solidFill>
-                <a:latin typeface="Microsoft JhengHei" pitchFamily="34" charset="-120"/>
-                <a:ea typeface="Microsoft JhengHei" pitchFamily="34" charset="-120"/>
-              </a:rPr>
-              <a:t>袮</a:t>
+              <a:t>祢</a:t>
             </a:r>
             <a:endParaRPr lang="zh-TW" altLang="en-US" sz="6400" b="1" dirty="0">
               <a:solidFill>
@@ -4692,13 +4343,6 @@
   <p:clrMapOvr>
     <a:masterClrMapping/>
   </p:clrMapOvr>
-  <p:timing>
-    <p:tnLst>
-      <p:par>
-        <p:cTn id="1" dur="indefinite" restart="never" nodeType="tmRoot"/>
-      </p:par>
-    </p:tnLst>
-  </p:timing>
 </p:sld>
 </file>
 
@@ -4752,27 +4396,7 @@
                 <a:latin typeface="Microsoft JhengHei" pitchFamily="34" charset="-120"/>
                 <a:ea typeface="Microsoft JhengHei" pitchFamily="34" charset="-120"/>
               </a:rPr>
-              <a:t>非圖得大榮</a:t>
-            </a:r>
-            <a:r>
-              <a:rPr lang="zh-TW" altLang="en-US" sz="6400" b="1" dirty="0">
-                <a:solidFill>
-                  <a:srgbClr val="660033"/>
-                </a:solidFill>
-                <a:latin typeface="Microsoft JhengHei" pitchFamily="34" charset="-120"/>
-                <a:ea typeface="Microsoft JhengHei" pitchFamily="34" charset="-120"/>
-              </a:rPr>
-              <a:t>耀  非</a:t>
-            </a:r>
-            <a:r>
-              <a:rPr lang="zh-TW" altLang="en-US" sz="6400" b="1" dirty="0">
-                <a:solidFill>
-                  <a:srgbClr val="660033"/>
-                </a:solidFill>
-                <a:latin typeface="Microsoft JhengHei" pitchFamily="34" charset="-120"/>
-                <a:ea typeface="Microsoft JhengHei" pitchFamily="34" charset="-120"/>
-              </a:rPr>
-              <a:t>圖得金冕</a:t>
+              <a:t>非圖得大榮耀  非圖得金冕</a:t>
             </a:r>
             <a:endParaRPr lang="en-US" altLang="zh-TW" sz="6400" b="1" dirty="0">
               <a:solidFill>
@@ -4794,27 +4418,17 @@
                 <a:latin typeface="Microsoft JhengHei" pitchFamily="34" charset="-120"/>
                 <a:ea typeface="Microsoft JhengHei" pitchFamily="34" charset="-120"/>
               </a:rPr>
-              <a:t>我順從主耶穌  主阿我</a:t>
-            </a:r>
-            <a:r>
-              <a:rPr lang="zh-TW" altLang="en-US" sz="6400" b="1" dirty="0">
+              <a:t>我順從主耶穌  主阿我屬</a:t>
+            </a:r>
+            <a:r>
+              <a:rPr lang="zh-CN" altLang="en-US" sz="6400" b="1" dirty="0">
                 <a:solidFill>
                   <a:srgbClr val="660033"/>
                 </a:solidFill>
                 <a:latin typeface="Microsoft JhengHei" pitchFamily="34" charset="-120"/>
                 <a:ea typeface="Microsoft JhengHei" pitchFamily="34" charset="-120"/>
               </a:rPr>
-              <a:t>屬</a:t>
-            </a:r>
-            <a:r>
-              <a:rPr lang="zh-CN" altLang="en-US" sz="6400" b="1" dirty="0">
-                <a:solidFill>
-                  <a:srgbClr val="660033"/>
-                </a:solidFill>
-                <a:latin typeface="Microsoft JhengHei" pitchFamily="34" charset="-120"/>
-                <a:ea typeface="Microsoft JhengHei" pitchFamily="34" charset="-120"/>
-              </a:rPr>
-              <a:t>袮</a:t>
+              <a:t>祢</a:t>
             </a:r>
             <a:endParaRPr lang="en-US" altLang="zh-TW" sz="6400" b="1" dirty="0">
               <a:solidFill>
@@ -4875,13 +4489,6 @@
   <p:clrMapOvr>
     <a:masterClrMapping/>
   </p:clrMapOvr>
-  <p:timing>
-    <p:tnLst>
-      <p:par>
-        <p:cTn id="1" dur="indefinite" restart="never" nodeType="tmRoot"/>
-      </p:par>
-    </p:tnLst>
-  </p:timing>
 </p:sld>
 </file>
 
@@ -4957,27 +4564,7 @@
                 <a:latin typeface="Microsoft JhengHei" pitchFamily="34" charset="-120"/>
                 <a:ea typeface="Microsoft JhengHei" pitchFamily="34" charset="-120"/>
               </a:rPr>
-              <a:t>凡被主所召</a:t>
-            </a:r>
-            <a:r>
-              <a:rPr lang="zh-TW" altLang="en-US" sz="6400" b="1" dirty="0">
-                <a:solidFill>
-                  <a:srgbClr val="660033"/>
-                </a:solidFill>
-                <a:latin typeface="Microsoft JhengHei" pitchFamily="34" charset="-120"/>
-                <a:ea typeface="Microsoft JhengHei" pitchFamily="34" charset="-120"/>
-              </a:rPr>
-              <a:t>者  必</a:t>
-            </a:r>
-            <a:r>
-              <a:rPr lang="zh-TW" altLang="en-US" sz="6400" b="1" dirty="0">
-                <a:solidFill>
-                  <a:srgbClr val="660033"/>
-                </a:solidFill>
-                <a:latin typeface="Microsoft JhengHei" pitchFamily="34" charset="-120"/>
-                <a:ea typeface="Microsoft JhengHei" pitchFamily="34" charset="-120"/>
-              </a:rPr>
-              <a:t>順服元帥</a:t>
+              <a:t>凡被主所召者  必順服元帥</a:t>
             </a:r>
           </a:p>
         </p:txBody>
@@ -5031,13 +4618,6 @@
   <p:clrMapOvr>
     <a:masterClrMapping/>
   </p:clrMapOvr>
-  <p:timing>
-    <p:tnLst>
-      <p:par>
-        <p:cTn id="1" dur="indefinite" restart="never" nodeType="tmRoot"/>
-      </p:par>
-    </p:tnLst>
-  </p:timing>
 </p:sld>
 </file>
 
@@ -5091,67 +4671,27 @@
                 <a:latin typeface="Microsoft JhengHei" pitchFamily="34" charset="-120"/>
                 <a:ea typeface="Microsoft JhengHei" pitchFamily="34" charset="-120"/>
               </a:rPr>
-              <a:t>主慈愛激勵</a:t>
-            </a:r>
-            <a:r>
-              <a:rPr lang="zh-TW" altLang="en-US" sz="6400" b="1" dirty="0">
+              <a:t>主慈愛激勵我</a:t>
+            </a:r>
+            <a:r>
+              <a:rPr lang="en-US" altLang="zh-TW" sz="6400" b="1" dirty="0">
                 <a:solidFill>
                   <a:srgbClr val="660033"/>
                 </a:solidFill>
                 <a:latin typeface="Microsoft JhengHei" pitchFamily="34" charset="-120"/>
                 <a:ea typeface="Microsoft JhengHei" pitchFamily="34" charset="-120"/>
               </a:rPr>
-              <a:t>我</a:t>
-            </a:r>
-            <a:r>
-              <a:rPr lang="en-US" altLang="zh-TW" sz="6400" b="1" dirty="0">
+              <a:t>  </a:t>
+            </a:r>
+            <a:r>
+              <a:rPr lang="zh-TW" altLang="en-US" sz="6400" b="1" dirty="0">
                 <a:solidFill>
                   <a:srgbClr val="660033"/>
                 </a:solidFill>
                 <a:latin typeface="Microsoft JhengHei" pitchFamily="34" charset="-120"/>
                 <a:ea typeface="Microsoft JhengHei" pitchFamily="34" charset="-120"/>
               </a:rPr>
-              <a:t>  </a:t>
-            </a:r>
-            <a:r>
-              <a:rPr lang="zh-TW" altLang="en-US" sz="6400" b="1" dirty="0">
-                <a:solidFill>
-                  <a:srgbClr val="660033"/>
-                </a:solidFill>
-                <a:latin typeface="Microsoft JhengHei" pitchFamily="34" charset="-120"/>
-                <a:ea typeface="Microsoft JhengHei" pitchFamily="34" charset="-120"/>
-              </a:rPr>
-              <a:t>此</a:t>
-            </a:r>
-            <a:r>
-              <a:rPr lang="zh-TW" altLang="en-US" sz="6400" b="1" dirty="0">
-                <a:solidFill>
-                  <a:srgbClr val="660033"/>
-                </a:solidFill>
-                <a:latin typeface="Microsoft JhengHei" pitchFamily="34" charset="-120"/>
-                <a:ea typeface="Microsoft JhengHei" pitchFamily="34" charset="-120"/>
-              </a:rPr>
-              <a:t>恩</a:t>
-            </a:r>
-            <a:r>
-              <a:rPr lang="zh-TW" altLang="en-US" sz="6400" b="1" dirty="0">
-                <a:solidFill>
-                  <a:srgbClr val="660033"/>
-                </a:solidFill>
-                <a:latin typeface="Microsoft JhengHei" pitchFamily="34" charset="-120"/>
-                <a:ea typeface="Microsoft JhengHei" pitchFamily="34" charset="-120"/>
-              </a:rPr>
-              <a:t>厚無</a:t>
-            </a:r>
-            <a:r>
-              <a:rPr lang="zh-TW" altLang="en-US" sz="6400" b="1" dirty="0">
-                <a:solidFill>
-                  <a:srgbClr val="660033"/>
-                </a:solidFill>
-                <a:latin typeface="Microsoft JhengHei" pitchFamily="34" charset="-120"/>
-                <a:ea typeface="Microsoft JhengHei" pitchFamily="34" charset="-120"/>
-              </a:rPr>
-              <a:t>比</a:t>
+              <a:t>此恩厚無比</a:t>
             </a:r>
             <a:endParaRPr lang="en-US" altLang="zh-TW" sz="6400" b="1" dirty="0">
               <a:solidFill>
@@ -5173,57 +4713,37 @@
                 <a:latin typeface="Microsoft JhengHei" pitchFamily="34" charset="-120"/>
                 <a:ea typeface="Microsoft JhengHei" pitchFamily="34" charset="-120"/>
               </a:rPr>
-              <a:t>我</a:t>
-            </a:r>
-            <a:r>
-              <a:rPr lang="zh-TW" altLang="en-US" sz="6400" b="1" dirty="0">
+              <a:t>我順從主耶穌</a:t>
+            </a:r>
+            <a:r>
+              <a:rPr lang="en-US" altLang="zh-TW" sz="6400" b="1" dirty="0">
                 <a:solidFill>
                   <a:srgbClr val="660033"/>
                 </a:solidFill>
                 <a:latin typeface="Microsoft JhengHei" pitchFamily="34" charset="-120"/>
                 <a:ea typeface="Microsoft JhengHei" pitchFamily="34" charset="-120"/>
               </a:rPr>
-              <a:t>順從主耶穌</a:t>
-            </a:r>
-            <a:r>
-              <a:rPr lang="en-US" altLang="zh-TW" sz="6400" b="1" dirty="0">
+              <a:t>  </a:t>
+            </a:r>
+            <a:r>
+              <a:rPr lang="zh-TW" altLang="en-US" sz="6400" b="1" dirty="0">
                 <a:solidFill>
                   <a:srgbClr val="660033"/>
                 </a:solidFill>
                 <a:latin typeface="Microsoft JhengHei" pitchFamily="34" charset="-120"/>
                 <a:ea typeface="Microsoft JhengHei" pitchFamily="34" charset="-120"/>
               </a:rPr>
-              <a:t>  </a:t>
-            </a:r>
-            <a:r>
-              <a:rPr lang="zh-TW" altLang="en-US" sz="6400" b="1" dirty="0">
+              <a:t>主阿  我屬</a:t>
+            </a:r>
+            <a:r>
+              <a:rPr lang="zh-CN" altLang="en-US" sz="6400" b="1" dirty="0">
                 <a:solidFill>
                   <a:srgbClr val="660033"/>
                 </a:solidFill>
                 <a:latin typeface="Microsoft JhengHei" pitchFamily="34" charset="-120"/>
                 <a:ea typeface="Microsoft JhengHei" pitchFamily="34" charset="-120"/>
               </a:rPr>
-              <a:t>主阿  我</a:t>
-            </a:r>
-            <a:r>
-              <a:rPr lang="zh-TW" altLang="en-US" sz="6400" b="1" dirty="0">
-                <a:solidFill>
-                  <a:srgbClr val="660033"/>
-                </a:solidFill>
-                <a:latin typeface="Microsoft JhengHei" pitchFamily="34" charset="-120"/>
-                <a:ea typeface="Microsoft JhengHei" pitchFamily="34" charset="-120"/>
-              </a:rPr>
-              <a:t>屬</a:t>
-            </a:r>
-            <a:r>
-              <a:rPr lang="zh-CN" altLang="en-US" sz="6400" b="1" dirty="0">
-                <a:solidFill>
-                  <a:srgbClr val="660033"/>
-                </a:solidFill>
-                <a:latin typeface="Microsoft JhengHei" pitchFamily="34" charset="-120"/>
-                <a:ea typeface="Microsoft JhengHei" pitchFamily="34" charset="-120"/>
-              </a:rPr>
-              <a:t>袮</a:t>
+              <a:t>祢</a:t>
             </a:r>
             <a:endParaRPr lang="zh-TW" altLang="en-US" sz="6400" b="1" dirty="0">
               <a:solidFill>
@@ -5284,13 +4804,6 @@
   <p:clrMapOvr>
     <a:masterClrMapping/>
   </p:clrMapOvr>
-  <p:timing>
-    <p:tnLst>
-      <p:par>
-        <p:cTn id="1" dur="indefinite" restart="never" nodeType="tmRoot"/>
-      </p:par>
-    </p:tnLst>
-  </p:timing>
 </p:sld>
 </file>
 
@@ -5427,13 +4940,6 @@
   <p:clrMapOvr>
     <a:masterClrMapping/>
   </p:clrMapOvr>
-  <p:timing>
-    <p:tnLst>
-      <p:par>
-        <p:cTn id="1" dur="indefinite" restart="never" nodeType="tmRoot"/>
-      </p:par>
-    </p:tnLst>
-  </p:timing>
 </p:sld>
 </file>
 
@@ -5509,27 +5015,7 @@
                 <a:latin typeface="Microsoft JhengHei" pitchFamily="34" charset="-120"/>
                 <a:ea typeface="Microsoft JhengHei" pitchFamily="34" charset="-120"/>
               </a:rPr>
-              <a:t>來到我主面</a:t>
-            </a:r>
-            <a:r>
-              <a:rPr lang="zh-TW" altLang="en-US" sz="6400" b="1" dirty="0">
-                <a:solidFill>
-                  <a:srgbClr val="660033"/>
-                </a:solidFill>
-                <a:latin typeface="Microsoft JhengHei" pitchFamily="34" charset="-120"/>
-                <a:ea typeface="Microsoft JhengHei" pitchFamily="34" charset="-120"/>
-              </a:rPr>
-              <a:t>前  恩</a:t>
-            </a:r>
-            <a:r>
-              <a:rPr lang="zh-TW" altLang="en-US" sz="6400" b="1" dirty="0">
-                <a:solidFill>
-                  <a:srgbClr val="660033"/>
-                </a:solidFill>
-                <a:latin typeface="Microsoft JhengHei" pitchFamily="34" charset="-120"/>
-                <a:ea typeface="Microsoft JhengHei" pitchFamily="34" charset="-120"/>
-              </a:rPr>
-              <a:t>賜就滿豐</a:t>
+              <a:t>來到我主面前  恩賜就滿豐</a:t>
             </a:r>
           </a:p>
         </p:txBody>
@@ -5583,13 +5069,6 @@
   <p:clrMapOvr>
     <a:masterClrMapping/>
   </p:clrMapOvr>
-  <p:timing>
-    <p:tnLst>
-      <p:par>
-        <p:cTn id="1" dur="indefinite" restart="never" nodeType="tmRoot"/>
-      </p:par>
-    </p:tnLst>
-  </p:timing>
 </p:sld>
 </file>
 
